--- a/inbox/Application Aware Networking/Vol_VII_Book_00_FedAAN_ServiceNow_Automation_Overview.pptx
+++ b/inbox/Application Aware Networking/Vol_VII_Book_00_FedAAN_ServiceNow_Automation_Overview.pptx
@@ -5917,7 +5917,7 @@
                 </a:solidFill>
                 <a:latin typeface="Arial"/>
               </a:rPr>
-              <a:t>Six books, two moves</a:t>
+              <a:t>Seven books, two moves</a:t>
             </a:r>
           </a:p>
         </p:txBody>
@@ -6015,7 +6015,7 @@
                 <a:gridCol w="2743200"/>
                 <a:gridCol w="2743200"/>
               </a:tblGrid>
-              <a:tr h="391885">
+              <a:tr h="342900">
                 <a:tc>
                   <a:txBody>
                     <a:bodyPr/>
@@ -6083,7 +6083,7 @@
                   </a:tcPr>
                 </a:tc>
               </a:tr>
-              <a:tr h="391885">
+              <a:tr h="342900">
                 <a:tc>
                   <a:txBody>
                     <a:bodyPr/>
@@ -6151,7 +6151,7 @@
                   </a:tcPr>
                 </a:tc>
               </a:tr>
-              <a:tr h="391885">
+              <a:tr h="342900">
                 <a:tc>
                   <a:txBody>
                     <a:bodyPr/>
@@ -6219,7 +6219,7 @@
                   </a:tcPr>
                 </a:tc>
               </a:tr>
-              <a:tr h="391885">
+              <a:tr h="342900">
                 <a:tc>
                   <a:txBody>
                     <a:bodyPr/>
@@ -6287,7 +6287,7 @@
                   </a:tcPr>
                 </a:tc>
               </a:tr>
-              <a:tr h="391885">
+              <a:tr h="342900">
                 <a:tc>
                   <a:txBody>
                     <a:bodyPr/>
@@ -6355,7 +6355,7 @@
                   </a:tcPr>
                 </a:tc>
               </a:tr>
-              <a:tr h="391885">
+              <a:tr h="342900">
                 <a:tc>
                   <a:txBody>
                     <a:bodyPr/>
@@ -6423,7 +6423,7 @@
                   </a:tcPr>
                 </a:tc>
               </a:tr>
-              <a:tr h="391890">
+              <a:tr h="342900">
                 <a:tc>
                   <a:txBody>
                     <a:bodyPr/>
@@ -6491,6 +6491,74 @@
                   </a:tcPr>
                 </a:tc>
               </a:tr>
+              <a:tr h="342900">
+                <a:tc>
+                  <a:txBody>
+                    <a:bodyPr/>
+                    <a:lstStyle/>
+                    <a:p>
+                      <a:r>
+                        <a:rPr sz="900" b="1">
+                          <a:solidFill>
+                            <a:srgbClr val="1F3A5F"/>
+                          </a:solidFill>
+                          <a:latin typeface="Arial"/>
+                        </a:rPr>
+                        <a:t>VII-06</a:t>
+                      </a:r>
+                    </a:p>
+                  </a:txBody>
+                  <a:tcPr anchor="ctr">
+                    <a:solidFill>
+                      <a:srgbClr val="FFFFFF"/>
+                    </a:solidFill>
+                  </a:tcPr>
+                </a:tc>
+                <a:tc>
+                  <a:txBody>
+                    <a:bodyPr/>
+                    <a:lstStyle/>
+                    <a:p>
+                      <a:r>
+                        <a:rPr sz="900">
+                          <a:solidFill>
+                            <a:srgbClr val="1E293B"/>
+                          </a:solidFill>
+                          <a:latin typeface="Arial"/>
+                        </a:rPr>
+                        <a:t>SaaS integration governance — Entra gallery as an SA-9 event</a:t>
+                      </a:r>
+                    </a:p>
+                  </a:txBody>
+                  <a:tcPr anchor="ctr">
+                    <a:solidFill>
+                      <a:srgbClr val="FFFFFF"/>
+                    </a:solidFill>
+                  </a:tcPr>
+                </a:tc>
+                <a:tc>
+                  <a:txBody>
+                    <a:bodyPr/>
+                    <a:lstStyle/>
+                    <a:p>
+                      <a:r>
+                        <a:rPr sz="900">
+                          <a:solidFill>
+                            <a:srgbClr val="1E293B"/>
+                          </a:solidFill>
+                          <a:latin typeface="Arial"/>
+                        </a:rPr>
+                        <a:t>Operate</a:t>
+                      </a:r>
+                    </a:p>
+                  </a:txBody>
+                  <a:tcPr anchor="ctr">
+                    <a:solidFill>
+                      <a:srgbClr val="FFFFFF"/>
+                    </a:solidFill>
+                  </a:tcPr>
+                </a:tc>
+              </a:tr>
             </a:tbl>
           </a:graphicData>
         </a:graphic>
@@ -6547,7 +6615,7 @@
                 </a:solidFill>
                 <a:latin typeface="Arial"/>
               </a:rPr>
-              <a:t>Reconcile once (Book 01); operate the loop on both clouds (02–03); attest the result (04); ship it as an app (05).</a:t>
+              <a:t>Reconcile once (Book 01); operate the loop on both clouds (02–03); attest the result (04); ship it as an app (05); govern SaaS integrations as SA-9 events (06).</a:t>
             </a:r>
           </a:p>
         </p:txBody>
@@ -7110,7 +7178,7 @@
                 </a:solidFill>
                 <a:latin typeface="Arial"/>
               </a:rPr>
-              <a:t>M365 GCC plus Moderate-targeted Azure; Graph and ARM resolve to the commercial endpoints that serve GCC Moderate (ADR-033).</a:t>
+              <a:t>M365 GCC plus Moderate-targeted Azure; Graph and ARM resolve to the commercial endpoints that serve GCC Moderate.</a:t>
             </a:r>
           </a:p>
         </p:txBody>

--- a/inbox/Application Aware Networking/Vol_VII_Book_00_FedAAN_ServiceNow_Automation_Overview.pptx
+++ b/inbox/Application Aware Networking/Vol_VII_Book_00_FedAAN_ServiceNow_Automation_Overview.pptx
@@ -5917,7 +5917,7 @@
                 </a:solidFill>
                 <a:latin typeface="Arial"/>
               </a:rPr>
-              <a:t>Seven books, two moves</a:t>
+              <a:t>Six books, two moves</a:t>
             </a:r>
           </a:p>
         </p:txBody>
@@ -6015,7 +6015,7 @@
                 <a:gridCol w="2743200"/>
                 <a:gridCol w="2743200"/>
               </a:tblGrid>
-              <a:tr h="342900">
+              <a:tr h="391885">
                 <a:tc>
                   <a:txBody>
                     <a:bodyPr/>
@@ -6083,7 +6083,7 @@
                   </a:tcPr>
                 </a:tc>
               </a:tr>
-              <a:tr h="342900">
+              <a:tr h="391885">
                 <a:tc>
                   <a:txBody>
                     <a:bodyPr/>
@@ -6151,7 +6151,7 @@
                   </a:tcPr>
                 </a:tc>
               </a:tr>
-              <a:tr h="342900">
+              <a:tr h="391885">
                 <a:tc>
                   <a:txBody>
                     <a:bodyPr/>
@@ -6219,7 +6219,7 @@
                   </a:tcPr>
                 </a:tc>
               </a:tr>
-              <a:tr h="342900">
+              <a:tr h="391885">
                 <a:tc>
                   <a:txBody>
                     <a:bodyPr/>
@@ -6287,7 +6287,7 @@
                   </a:tcPr>
                 </a:tc>
               </a:tr>
-              <a:tr h="342900">
+              <a:tr h="391885">
                 <a:tc>
                   <a:txBody>
                     <a:bodyPr/>
@@ -6355,7 +6355,7 @@
                   </a:tcPr>
                 </a:tc>
               </a:tr>
-              <a:tr h="342900">
+              <a:tr h="391885">
                 <a:tc>
                   <a:txBody>
                     <a:bodyPr/>
@@ -6423,7 +6423,7 @@
                   </a:tcPr>
                 </a:tc>
               </a:tr>
-              <a:tr h="342900">
+              <a:tr h="391890">
                 <a:tc>
                   <a:txBody>
                     <a:bodyPr/>
@@ -6459,74 +6459,6 @@
                           <a:latin typeface="Arial"/>
                         </a:rPr>
                         <a:t>The deployable scoped app</a:t>
-                      </a:r>
-                    </a:p>
-                  </a:txBody>
-                  <a:tcPr anchor="ctr">
-                    <a:solidFill>
-                      <a:srgbClr val="FFFFFF"/>
-                    </a:solidFill>
-                  </a:tcPr>
-                </a:tc>
-                <a:tc>
-                  <a:txBody>
-                    <a:bodyPr/>
-                    <a:lstStyle/>
-                    <a:p>
-                      <a:r>
-                        <a:rPr sz="900">
-                          <a:solidFill>
-                            <a:srgbClr val="1E293B"/>
-                          </a:solidFill>
-                          <a:latin typeface="Arial"/>
-                        </a:rPr>
-                        <a:t>Operate</a:t>
-                      </a:r>
-                    </a:p>
-                  </a:txBody>
-                  <a:tcPr anchor="ctr">
-                    <a:solidFill>
-                      <a:srgbClr val="FFFFFF"/>
-                    </a:solidFill>
-                  </a:tcPr>
-                </a:tc>
-              </a:tr>
-              <a:tr h="342900">
-                <a:tc>
-                  <a:txBody>
-                    <a:bodyPr/>
-                    <a:lstStyle/>
-                    <a:p>
-                      <a:r>
-                        <a:rPr sz="900" b="1">
-                          <a:solidFill>
-                            <a:srgbClr val="1F3A5F"/>
-                          </a:solidFill>
-                          <a:latin typeface="Arial"/>
-                        </a:rPr>
-                        <a:t>VII-06</a:t>
-                      </a:r>
-                    </a:p>
-                  </a:txBody>
-                  <a:tcPr anchor="ctr">
-                    <a:solidFill>
-                      <a:srgbClr val="FFFFFF"/>
-                    </a:solidFill>
-                  </a:tcPr>
-                </a:tc>
-                <a:tc>
-                  <a:txBody>
-                    <a:bodyPr/>
-                    <a:lstStyle/>
-                    <a:p>
-                      <a:r>
-                        <a:rPr sz="900">
-                          <a:solidFill>
-                            <a:srgbClr val="1E293B"/>
-                          </a:solidFill>
-                          <a:latin typeface="Arial"/>
-                        </a:rPr>
-                        <a:t>SaaS integration governance — Entra gallery as an SA-9 event</a:t>
                       </a:r>
                     </a:p>
                   </a:txBody>
